--- a/assets/pptx/catalog-568.pptx
+++ b/assets/pptx/catalog-568.pptx
@@ -3337,7 +3337,7 @@
                 <a:ea typeface="Ebrima"/>
                 <a:cs typeface="Ebrima"/>
               </a:rPr>
-              <a:t>ወደዚህ ወደዚያ ያደርጉታል (2x)</a:t>
+              <a:t>ወደዚህ ወደዚያ ያደርጉታል 2x</a:t>
             </a:r>
           </a:p>
         </p:txBody>
@@ -3440,7 +3440,7 @@
                 <a:ea typeface="Ebrima"/>
                 <a:cs typeface="Ebrima"/>
               </a:rPr>
-              <a:t>እርሱ ነው እኔን የሰራኝ አሃሃ (2x)</a:t>
+              <a:t>እርሱ ነው እኔን የሰራኝ አሃሃ 2x</a:t>
             </a:r>
           </a:p>
         </p:txBody>
@@ -3525,7 +3525,7 @@
                 <a:ea typeface="Ebrima"/>
                 <a:cs typeface="Ebrima"/>
               </a:rPr>
-              <a:t>ኦ ልዩ ነህ ኦ (2x)</a:t>
+              <a:t>ኦ ልዩ ነህ ኦ 2x</a:t>
             </a:r>
           </a:p>
         </p:txBody>
@@ -3731,7 +3731,7 @@
                 <a:ea typeface="Ebrima"/>
                 <a:cs typeface="Ebrima"/>
               </a:rPr>
-              <a:t>ኦ ልዩ ነህ ኦ (2x)</a:t>
+              <a:t>ኦ ልዩ ነህ ኦ 2x</a:t>
             </a:r>
           </a:p>
         </p:txBody>
@@ -3973,7 +3973,7 @@
                 <a:ea typeface="Ebrima"/>
                 <a:cs typeface="Ebrima"/>
               </a:rPr>
-              <a:t>ወደዚህ ወደዚያ ያደርጉታል (2x)</a:t>
+              <a:t>ወደዚህ ወደዚያ ያደርጉታል 2x</a:t>
             </a:r>
           </a:p>
         </p:txBody>
@@ -4058,7 +4058,7 @@
                 <a:ea typeface="Ebrima"/>
                 <a:cs typeface="Ebrima"/>
               </a:rPr>
-              <a:t>ወደዚህ ወደዚያ ያደርጉታል (2x)</a:t>
+              <a:t>ወደዚህ ወደዚያ ያደርጉታል 2x</a:t>
             </a:r>
           </a:p>
         </p:txBody>
@@ -4161,7 +4161,7 @@
                 <a:ea typeface="Ebrima"/>
                 <a:cs typeface="Ebrima"/>
               </a:rPr>
-              <a:t>እርሱ ነው እኔን የሰራኝ አሃሃ (2x)</a:t>
+              <a:t>እርሱ ነው እኔን የሰራኝ አሃሃ 2x</a:t>
             </a:r>
           </a:p>
         </p:txBody>
@@ -4246,7 +4246,7 @@
                 <a:ea typeface="Ebrima"/>
                 <a:cs typeface="Ebrima"/>
               </a:rPr>
-              <a:t>ኦ ልዩ ነህ ኦ (2x)</a:t>
+              <a:t>ኦ ልዩ ነህ ኦ 2x</a:t>
             </a:r>
           </a:p>
         </p:txBody>
@@ -4385,7 +4385,7 @@
                 <a:ea typeface="Ebrima"/>
                 <a:cs typeface="Ebrima"/>
               </a:rPr>
-              <a:t>ወደዚህ ወደዚያ ያደርጉታል (2x)</a:t>
+              <a:t>ወደዚህ ወደዚያ ያደርጉታል 2x</a:t>
             </a:r>
           </a:p>
         </p:txBody>
@@ -4470,7 +4470,7 @@
                 <a:ea typeface="Ebrima"/>
                 <a:cs typeface="Ebrima"/>
               </a:rPr>
-              <a:t>አድራለሁኝ ከእርሱ ጋራ አስተማማኝ የሚያኮራ (2x)</a:t>
+              <a:t>አድራለሁኝ ከእርሱ ጋራ አስተማማኝ የሚያኮራ 2x</a:t>
             </a:r>
           </a:p>
         </p:txBody>
@@ -4676,7 +4676,7 @@
                 <a:ea typeface="Ebrima"/>
                 <a:cs typeface="Ebrima"/>
               </a:rPr>
-              <a:t>አድራለሁኝ ከእርሱ ጋራ አስተማማኝ የሚያኮራ (2x)</a:t>
+              <a:t>አድራለሁኝ ከእርሱ ጋራ አስተማማኝ የሚያኮራ 2x</a:t>
             </a:r>
           </a:p>
         </p:txBody>
@@ -4761,7 +4761,7 @@
                 <a:ea typeface="Ebrima"/>
                 <a:cs typeface="Ebrima"/>
               </a:rPr>
-              <a:t>የእኔማ አምላክ ይሄው ድንቅ አድራጊው (2x)</a:t>
+              <a:t>የእኔማ አምላክ ይሄው ድንቅ አድራጊው 2x</a:t>
             </a:r>
           </a:p>
         </p:txBody>
@@ -4828,7 +4828,7 @@
                 <a:ea typeface="Ebrima"/>
                 <a:cs typeface="Ebrima"/>
               </a:rPr>
-              <a:t>የእኔማ አምላክ ይሄው ድንቅ አድራጊው (2x)</a:t>
+              <a:t>የእኔማ አምላክ ይሄው ድንቅ አድራጊው 2x</a:t>
             </a:r>
           </a:p>
           <a:p>
@@ -4949,7 +4949,7 @@
                 <a:ea typeface="Ebrima"/>
                 <a:cs typeface="Ebrima"/>
               </a:rPr>
-              <a:t>የእኔ አምላክ ፈዋሽ ነው ሰውን ያድናል (2x)</a:t>
+              <a:t>የእኔ አምላክ ፈዋሽ ነው ሰውን ያድናል 2x</a:t>
             </a:r>
           </a:p>
           <a:p>
@@ -5160,7 +5160,7 @@
                 <a:ea typeface="Ebrima"/>
                 <a:cs typeface="Ebrima"/>
               </a:rPr>
-              <a:t>የእኔ ንጉሥ ይኸው ድንቅ አድራጊው (2x)</a:t>
+              <a:t>የእኔ ንጉሥ ይኸው ድንቅ አድራጊው 2x</a:t>
             </a:r>
           </a:p>
         </p:txBody>
@@ -5263,7 +5263,7 @@
                 <a:ea typeface="Ebrima"/>
                 <a:cs typeface="Ebrima"/>
               </a:rPr>
-              <a:t>እርሱ ነው እኔን የሰራኝ አሃሃ (2x)</a:t>
+              <a:t>እርሱ ነው እኔን የሰራኝ አሃሃ 2x</a:t>
             </a:r>
           </a:p>
         </p:txBody>
@@ -5402,7 +5402,7 @@
                 <a:ea typeface="Ebrima"/>
                 <a:cs typeface="Ebrima"/>
               </a:rPr>
-              <a:t>ወደዚህ ወደዚያ ያደርጉታል (2x)</a:t>
+              <a:t>ወደዚህ ወደዚያ ያደርጉታል 2x</a:t>
             </a:r>
           </a:p>
         </p:txBody>
@@ -5505,7 +5505,7 @@
                 <a:ea typeface="Ebrima"/>
                 <a:cs typeface="Ebrima"/>
               </a:rPr>
-              <a:t>እርሱ ነው እኔን የሰራኝ አሃሃ (2x)</a:t>
+              <a:t>እርሱ ነው እኔን የሰራኝ አሃሃ 2x</a:t>
             </a:r>
           </a:p>
         </p:txBody>
@@ -5590,7 +5590,7 @@
                 <a:ea typeface="Ebrima"/>
                 <a:cs typeface="Ebrima"/>
               </a:rPr>
-              <a:t>ኦ ልዩ ነህ ኦ (2x)</a:t>
+              <a:t>ኦ ልዩ ነህ ኦ 2x</a:t>
             </a:r>
           </a:p>
         </p:txBody>
@@ -5675,7 +5675,7 @@
                 <a:ea typeface="Ebrima"/>
                 <a:cs typeface="Ebrima"/>
               </a:rPr>
-              <a:t>አድራለሁኝ ከእርሱ ጋራ አስተማማኝ የሚያኮራ (2x)</a:t>
+              <a:t>አድራለሁኝ ከእርሱ ጋራ አስተማማኝ የሚያኮራ 2x</a:t>
             </a:r>
           </a:p>
         </p:txBody>
@@ -5881,7 +5881,7 @@
                 <a:ea typeface="Ebrima"/>
                 <a:cs typeface="Ebrima"/>
               </a:rPr>
-              <a:t>አድራለሁኝ ከእርሱ ጋራ አስተማማኝ የሚያኮራ (2x)</a:t>
+              <a:t>አድራለሁኝ ከእርሱ ጋራ አስተማማኝ የሚያኮራ 2x</a:t>
             </a:r>
           </a:p>
         </p:txBody>
